--- a/media/resources/files/ButunSandardyJanaOnduktardy_KoshuuKemituu_XjanaO_ET3HwXA.pptx
+++ b/media/resources/files/ButunSandardyJanaOnduktardy_KoshuuKemituu_XjanaO_ET3HwXA.pptx
@@ -3965,7 +3965,7 @@
                 <a:ea typeface="+mn-ea"/>
                 <a:cs typeface="Arial" panose="020B0604020202020204" pitchFamily="34" charset="0"/>
               </a:rPr>
-              <a:t>Мугалим үчүн жооп баракчасы жана таратма материалдар камтылган.</a:t>
+              <a:t>Мугалим үчүн жооп барагы жана таратма материалдар бар.</a:t>
             </a:r>
           </a:p>
           <a:p>
@@ -4034,7 +4034,7 @@
                 <a:ea typeface="+mn-ea"/>
                 <a:cs typeface="Arial" panose="020B0604020202020204" pitchFamily="34" charset="0"/>
               </a:rPr>
-              <a:t>Кайсы команда туура жооп бергенине жараша '</a:t>
+              <a:t>Туура жооп берген командага жараша «</a:t>
             </a:r>
             <a:r>
               <a:rPr kumimoji="0" lang="en-GB" sz="2000" b="0" i="0" u="sng" strike="noStrike" kern="1200" cap="none" spc="0" normalizeH="0" baseline="0" noProof="0" dirty="0">
@@ -4051,7 +4051,7 @@
                 <a:ea typeface="+mn-ea"/>
                 <a:cs typeface="Arial" panose="020B0604020202020204" pitchFamily="34" charset="0"/>
               </a:rPr>
-              <a:t>X' </a:t>
+              <a:t>X» </a:t>
             </a:r>
             <a:r>
               <a:rPr kumimoji="0" lang="ru-RU" sz="2000" b="0" i="0" u="sng" strike="noStrike" kern="1200" cap="none" spc="0" normalizeH="0" baseline="0" noProof="0" dirty="0">
@@ -4068,7 +4068,7 @@
                 <a:ea typeface="+mn-ea"/>
                 <a:cs typeface="Arial" panose="020B0604020202020204" pitchFamily="34" charset="0"/>
               </a:rPr>
-              <a:t>же '</a:t>
+              <a:t>же «</a:t>
             </a:r>
             <a:r>
               <a:rPr kumimoji="0" lang="en-GB" sz="2000" b="0" i="0" u="sng" strike="noStrike" kern="1200" cap="none" spc="0" normalizeH="0" baseline="0" noProof="0" dirty="0">
@@ -4085,7 +4085,7 @@
                 <a:ea typeface="+mn-ea"/>
                 <a:cs typeface="Arial" panose="020B0604020202020204" pitchFamily="34" charset="0"/>
               </a:rPr>
-              <a:t>O' </a:t>
+              <a:t>O» </a:t>
             </a:r>
             <a:r>
               <a:rPr kumimoji="0" lang="ru-RU" sz="2000" b="0" i="0" u="sng" strike="noStrike" kern="1200" cap="none" spc="0" normalizeH="0" baseline="0" noProof="0" dirty="0">
@@ -4102,7 +4102,7 @@
                 <a:ea typeface="+mn-ea"/>
                 <a:cs typeface="Arial" panose="020B0604020202020204" pitchFamily="34" charset="0"/>
               </a:rPr>
-              <a:t>баскычын басыңыз/тийип коюңуз</a:t>
+              <a:t>баскычын басыңыз</a:t>
             </a:r>
             <a:r>
               <a:rPr kumimoji="0" lang="en-GB" sz="2000" b="0" i="0" u="none" strike="noStrike" kern="1200" cap="none" spc="0" normalizeH="0" baseline="0" noProof="0" dirty="0">
@@ -4761,7 +4761,7 @@
             <a:pPr algn="ctr"/>
             <a:r>
               <a:rPr lang="en-GB" sz="4400" dirty="0"/>
-              <a:t>4 + 3.7</a:t>
+              <a:t>4 + 3,7</a:t>
             </a:r>
           </a:p>
         </p:txBody>
@@ -4797,7 +4797,7 @@
             <a:pPr algn="ctr"/>
             <a:r>
               <a:rPr lang="en-GB" sz="4400" dirty="0"/>
-              <a:t>1.95 + 6</a:t>
+              <a:t>1,95 + 6</a:t>
             </a:r>
           </a:p>
         </p:txBody>
@@ -4833,7 +4833,7 @@
             <a:pPr algn="ctr"/>
             <a:r>
               <a:rPr lang="en-GB" sz="4400" dirty="0"/>
-              <a:t>7 – 3.24</a:t>
+              <a:t>7 – 3,24</a:t>
             </a:r>
           </a:p>
         </p:txBody>
@@ -4869,7 +4869,7 @@
             <a:pPr algn="ctr"/>
             <a:r>
               <a:rPr lang="en-GB" sz="4400" dirty="0"/>
-              <a:t>7 – 4.18</a:t>
+              <a:t>7 – 4,18</a:t>
             </a:r>
           </a:p>
         </p:txBody>
@@ -4905,7 +4905,7 @@
             <a:pPr algn="ctr"/>
             <a:r>
               <a:rPr lang="en-GB" sz="4400" dirty="0"/>
-              <a:t>8 – 1.64</a:t>
+              <a:t>8 – 1,64</a:t>
             </a:r>
           </a:p>
         </p:txBody>
@@ -4941,7 +4941,7 @@
             <a:pPr algn="ctr"/>
             <a:r>
               <a:rPr lang="en-GB" sz="4400" dirty="0"/>
-              <a:t>5 + 3.82 + 2.3</a:t>
+              <a:t>5 + 3,82 + 2,3</a:t>
             </a:r>
           </a:p>
         </p:txBody>
@@ -4977,7 +4977,7 @@
             <a:pPr algn="ctr"/>
             <a:r>
               <a:rPr lang="en-GB" sz="4400" dirty="0"/>
-              <a:t>8 + 2.53 + 5.1</a:t>
+              <a:t>8 + 2,53 + 5,1</a:t>
             </a:r>
           </a:p>
         </p:txBody>
@@ -5013,7 +5013,7 @@
             <a:pPr algn="ctr"/>
             <a:r>
               <a:rPr lang="en-GB" sz="4400" dirty="0"/>
-              <a:t>3.47 + 4 + 2.3</a:t>
+              <a:t>3,47 + 4 + 2,3</a:t>
             </a:r>
           </a:p>
         </p:txBody>
@@ -5049,7 +5049,7 @@
             <a:pPr algn="ctr"/>
             <a:r>
               <a:rPr lang="en-GB" sz="4400" dirty="0"/>
-              <a:t>7 – 4.57</a:t>
+              <a:t>7 – 4,57</a:t>
             </a:r>
           </a:p>
         </p:txBody>
